--- a/resources/presentations/airlines.pptx
+++ b/resources/presentations/airlines.pptx
@@ -7,8 +7,8 @@
   <p:sldIdLst>
     <p:sldId id="256" r:id="rId2"/>
     <p:sldId id="258" r:id="rId3"/>
-    <p:sldId id="263" r:id="rId4"/>
-    <p:sldId id="262" r:id="rId5"/>
+    <p:sldId id="262" r:id="rId4"/>
+    <p:sldId id="263" r:id="rId5"/>
     <p:sldId id="257" r:id="rId6"/>
     <p:sldId id="259" r:id="rId7"/>
     <p:sldId id="261" r:id="rId8"/>
@@ -3541,7 +3541,7 @@
           <p:cNvPr id="2" name="Заголовок 1">
             <a:extLst>
               <a:ext uri="{FF2B5EF4-FFF2-40B4-BE49-F238E27FC236}">
-                <a16:creationId xmlns:a16="http://schemas.microsoft.com/office/drawing/2014/main" id="{5EC8AB34-97CF-4AEA-8627-61855D1FE086}"/>
+                <a16:creationId xmlns:a16="http://schemas.microsoft.com/office/drawing/2014/main" id="{4D438621-E3DF-442D-9F36-ACC656557344}"/>
               </a:ext>
             </a:extLst>
           </p:cNvPr>
@@ -3554,51 +3554,70 @@
         </p:nvSpPr>
         <p:spPr/>
         <p:txBody>
-          <a:bodyPr/>
-          <a:lstStyle/>
-          <a:p>
-            <a:r>
-              <a:rPr lang="ru-RU" i="0" dirty="0">
-                <a:solidFill>
-                  <a:srgbClr val="222222"/>
-                </a:solidFill>
+          <a:bodyPr>
+            <a:normAutofit/>
+          </a:bodyPr>
+          <a:lstStyle/>
+          <a:p>
+            <a:r>
+              <a:rPr lang="ru-RU" dirty="0"/>
+              <a:t>Ключевое сообщение для руководства авиакомпании</a:t>
+            </a:r>
+          </a:p>
+        </p:txBody>
+      </p:sp>
+      <p:sp>
+        <p:nvSpPr>
+          <p:cNvPr id="3" name="Объект 2">
+            <a:extLst>
+              <a:ext uri="{FF2B5EF4-FFF2-40B4-BE49-F238E27FC236}">
+                <a16:creationId xmlns:a16="http://schemas.microsoft.com/office/drawing/2014/main" id="{53397423-9A3F-4813-BD97-C5C1274D0C48}"/>
+              </a:ext>
+            </a:extLst>
+          </p:cNvPr>
+          <p:cNvSpPr>
+            <a:spLocks noGrp="1"/>
+          </p:cNvSpPr>
+          <p:nvPr>
+            <p:ph idx="1"/>
+          </p:nvPr>
+        </p:nvSpPr>
+        <p:spPr/>
+        <p:txBody>
+          <a:bodyPr/>
+          <a:lstStyle/>
+          <a:p>
+            <a:r>
+              <a:rPr lang="ru-RU" b="0" i="0" dirty="0">
                 <a:effectLst/>
+                <a:latin typeface="+mj-lt"/>
               </a:rPr>
-              <a:t>Ключевые результаты</a:t>
-            </a:r>
-            <a:endParaRPr lang="ru-RU" dirty="0"/>
-          </a:p>
-        </p:txBody>
-      </p:sp>
-      <p:sp>
-        <p:nvSpPr>
-          <p:cNvPr id="3" name="Объект 2">
-            <a:extLst>
-              <a:ext uri="{FF2B5EF4-FFF2-40B4-BE49-F238E27FC236}">
-                <a16:creationId xmlns:a16="http://schemas.microsoft.com/office/drawing/2014/main" id="{68DE13FF-1A92-446F-88DB-E121868E77B4}"/>
-              </a:ext>
-            </a:extLst>
-          </p:cNvPr>
-          <p:cNvSpPr>
-            <a:spLocks noGrp="1"/>
-          </p:cNvSpPr>
-          <p:nvPr>
-            <p:ph idx="1"/>
-          </p:nvPr>
-        </p:nvSpPr>
-        <p:spPr/>
-        <p:txBody>
-          <a:bodyPr/>
-          <a:lstStyle/>
-          <a:p>
-            <a:endParaRPr lang="ru-RU"/>
+              <a:t>Наше решение позволяет авиакомпании </a:t>
+            </a:r>
+            <a:r>
+              <a:rPr lang="ru-RU" b="0" i="0" dirty="0" err="1">
+                <a:effectLst/>
+                <a:latin typeface="+mj-lt"/>
+              </a:rPr>
+              <a:t>Yoyoflot</a:t>
+            </a:r>
+            <a:r>
+              <a:rPr lang="ru-RU" b="0" i="0" dirty="0">
+                <a:effectLst/>
+                <a:latin typeface="+mj-lt"/>
+              </a:rPr>
+              <a:t> полностью соответствовать новым государственным регуляциям, выявляя подозрительных пассажиров на ранних этапах. Это защищает репутацию бренда, исключает риски штрафов и гарантирует безопасность полетов без ущерба для лояльных клиентов</a:t>
+            </a:r>
+            <a:endParaRPr lang="ru-RU" dirty="0">
+              <a:latin typeface="+mj-lt"/>
+            </a:endParaRPr>
           </a:p>
         </p:txBody>
       </p:sp>
     </p:spTree>
     <p:extLst>
       <p:ext uri="{BB962C8B-B14F-4D97-AF65-F5344CB8AC3E}">
-        <p14:creationId xmlns:p14="http://schemas.microsoft.com/office/powerpoint/2010/main" val="81254020"/>
+        <p14:creationId xmlns:p14="http://schemas.microsoft.com/office/powerpoint/2010/main" val="1235328708"/>
       </p:ext>
     </p:extLst>
   </p:cSld>
@@ -3630,7 +3649,7 @@
           <p:cNvPr id="2" name="Заголовок 1">
             <a:extLst>
               <a:ext uri="{FF2B5EF4-FFF2-40B4-BE49-F238E27FC236}">
-                <a16:creationId xmlns:a16="http://schemas.microsoft.com/office/drawing/2014/main" id="{4D438621-E3DF-442D-9F36-ACC656557344}"/>
+                <a16:creationId xmlns:a16="http://schemas.microsoft.com/office/drawing/2014/main" id="{5EC8AB34-97CF-4AEA-8627-61855D1FE086}"/>
               </a:ext>
             </a:extLst>
           </p:cNvPr>
@@ -3643,47 +3662,54 @@
         </p:nvSpPr>
         <p:spPr/>
         <p:txBody>
-          <a:bodyPr>
-            <a:normAutofit/>
-          </a:bodyPr>
+          <a:bodyPr/>
+          <a:lstStyle/>
+          <a:p>
+            <a:r>
+              <a:rPr lang="ru-RU" i="0" dirty="0">
+                <a:solidFill>
+                  <a:srgbClr val="222222"/>
+                </a:solidFill>
+                <a:effectLst/>
+              </a:rPr>
+              <a:t>Ключевые результаты</a:t>
+            </a:r>
+            <a:endParaRPr lang="ru-RU" dirty="0"/>
+          </a:p>
+        </p:txBody>
+      </p:sp>
+      <p:sp>
+        <p:nvSpPr>
+          <p:cNvPr id="3" name="Объект 2">
+            <a:extLst>
+              <a:ext uri="{FF2B5EF4-FFF2-40B4-BE49-F238E27FC236}">
+                <a16:creationId xmlns:a16="http://schemas.microsoft.com/office/drawing/2014/main" id="{68DE13FF-1A92-446F-88DB-E121868E77B4}"/>
+              </a:ext>
+            </a:extLst>
+          </p:cNvPr>
+          <p:cNvSpPr>
+            <a:spLocks noGrp="1"/>
+          </p:cNvSpPr>
+          <p:nvPr>
+            <p:ph idx="1"/>
+          </p:nvPr>
+        </p:nvSpPr>
+        <p:spPr/>
+        <p:txBody>
+          <a:bodyPr/>
           <a:lstStyle/>
           <a:p>
             <a:r>
               <a:rPr lang="ru-RU" dirty="0"/>
-              <a:t>Ключевое сообщение для руководства авиакомпании</a:t>
-            </a:r>
-          </a:p>
-        </p:txBody>
-      </p:sp>
-      <p:sp>
-        <p:nvSpPr>
-          <p:cNvPr id="3" name="Объект 2">
-            <a:extLst>
-              <a:ext uri="{FF2B5EF4-FFF2-40B4-BE49-F238E27FC236}">
-                <a16:creationId xmlns:a16="http://schemas.microsoft.com/office/drawing/2014/main" id="{53397423-9A3F-4813-BD97-C5C1274D0C48}"/>
-              </a:ext>
-            </a:extLst>
-          </p:cNvPr>
-          <p:cNvSpPr>
-            <a:spLocks noGrp="1"/>
-          </p:cNvSpPr>
-          <p:nvPr>
-            <p:ph idx="1"/>
-          </p:nvPr>
-        </p:nvSpPr>
-        <p:spPr/>
-        <p:txBody>
-          <a:bodyPr/>
-          <a:lstStyle/>
-          <a:p>
-            <a:endParaRPr lang="ru-RU" dirty="0"/>
+              <a:t>Список подозреваемых</a:t>
+            </a:r>
           </a:p>
         </p:txBody>
       </p:sp>
     </p:spTree>
     <p:extLst>
       <p:ext uri="{BB962C8B-B14F-4D97-AF65-F5344CB8AC3E}">
-        <p14:creationId xmlns:p14="http://schemas.microsoft.com/office/powerpoint/2010/main" val="1235328708"/>
+        <p14:creationId xmlns:p14="http://schemas.microsoft.com/office/powerpoint/2010/main" val="81254020"/>
       </p:ext>
     </p:extLst>
   </p:cSld>
@@ -4056,6 +4082,16 @@
           <a:bodyPr/>
           <a:lstStyle/>
           <a:p>
+            <a:r>
+              <a:rPr lang="ru-RU" b="0" i="0" dirty="0">
+                <a:solidFill>
+                  <a:srgbClr val="222222"/>
+                </a:solidFill>
+                <a:effectLst/>
+                <a:latin typeface="ui-monospace"/>
+              </a:rPr>
+              <a:t>Внедрить автоматическую проверку новых бронирований по нашим правилам</a:t>
+            </a:r>
             <a:endParaRPr lang="ru-RU" dirty="0"/>
           </a:p>
         </p:txBody>
